--- a/tests/fixtures/adversarial/decks/L001-title-zero-slack.pptx
+++ b/tests/fixtures/adversarial/decks/L001-title-zero-slack.pptx
@@ -3097,7 +3097,7 @@
         <p:spPr>
           <a:xfrm>
             <a:off x="914400" y="731520"/>
-            <a:ext cx="12627864" cy="1463040"/>
+            <a:ext cx="11626596" cy="1463040"/>
           </a:xfrm>
           <a:prstGeom prst="rect">
             <a:avLst/>
